--- a/modulo-05/05.02 - Visão Geral do RAP_ A Camada de Exposição de Serviços (Service Provisioning)/05.02_Exposição_de_serviços_no_RAP.pptx
+++ b/modulo-05/05.02 - Visão Geral do RAP_ A Camada de Exposição de Serviços (Service Provisioning)/05.02_Exposição_de_serviços_no_RAP.pptx
@@ -1550,7 +1550,7 @@
                   <a:srgbClr val="8FA3C7"/>
                 </a:solidFill>
               </a:rPr>
-              <a:t>ABAP Moderno · Módulo 03 — SAP Fiori Elements com OData V4  ·  Aula 2 de 11 — Exposição de serviços</a:t>
+              <a:t>ABAP Moderno · Módulo 05 — SAP Fiori Elements com OData V4  ·  Aula 2 de 11 — Exposição de serviços</a:t>
             </a:r>
             <a:endParaRPr lang="en-US" sz="900" dirty="0"/>
           </a:p>
@@ -1696,7 +1696,7 @@
                   <a:srgbClr val="556B82"/>
                 </a:solidFill>
               </a:rPr>
-              <a:t>ABAP Moderno · Módulo 03 — SAP Fiori Elements com OData V4  ·  Aula 2 de 11 — Exposição de serviços</a:t>
+              <a:t>ABAP Moderno · Módulo 05 — SAP Fiori Elements com OData V4  ·  Aula 2 de 11 — Exposição de serviços</a:t>
             </a:r>
             <a:endParaRPr lang="en-US" sz="900" dirty="0"/>
           </a:p>
@@ -2127,7 +2127,7 @@
                   <a:srgbClr val="89D1FF"/>
                 </a:solidFill>
               </a:rPr>
-              <a:t>MÓDULO 03 · AULA 02 DE 11</a:t>
+              <a:t>MÓDULO 05 · AULA 02 DE 11</a:t>
             </a:r>
             <a:endParaRPr lang="en-US" sz="1400" dirty="0"/>
           </a:p>
@@ -2557,7 +2557,7 @@
                   <a:srgbClr val="8FA3C7"/>
                 </a:solidFill>
               </a:rPr>
-              <a:t>ABAP Moderno · Módulo 03 — SAP Fiori Elements com OData V4 · Design System SAP Horizon</a:t>
+              <a:t>ABAP Moderno · Módulo 05 — SAP Fiori Elements com OData V4 · Design System SAP Horizon</a:t>
             </a:r>
             <a:endParaRPr lang="en-US" sz="1100" dirty="0"/>
           </a:p>
@@ -2644,7 +2644,7 @@
                   <a:srgbClr val="0064D9"/>
                 </a:solidFill>
               </a:rPr>
-              <a:t>PUBLISH · EXERCÍCIO DO CURSO</a:t>
+              <a:t>PUBLISH · NO PROJETO</a:t>
             </a:r>
             <a:endParaRPr lang="en-US" sz="1100" dirty="0"/>
           </a:p>
@@ -2682,7 +2682,7 @@
                   <a:srgbClr val="1D2D3E"/>
                 </a:solidFill>
               </a:rPr>
-              <a:t>Do gerador ao primeiro preview</a:t>
+              <a:t>Da ativação ao primeiro preview</a:t>
             </a:r>
             <a:endParaRPr lang="en-US" sz="2800" dirty="0"/>
           </a:p>
@@ -2696,7 +2696,7 @@
         </p:nvSpPr>
         <p:spPr>
           <a:xfrm>
-            <a:off x="1860004" y="2656332"/>
+            <a:off x="1860004" y="2564892"/>
             <a:ext cx="8471687" cy="0"/>
           </a:xfrm>
           <a:prstGeom prst="line">
@@ -2719,7 +2719,7 @@
         </p:nvSpPr>
         <p:spPr>
           <a:xfrm>
-            <a:off x="1512532" y="2308860"/>
+            <a:off x="1512532" y="2217420"/>
             <a:ext cx="694944" cy="694944"/>
           </a:xfrm>
           <a:prstGeom prst="ellipse">
@@ -2739,7 +2739,7 @@
         </p:nvSpPr>
         <p:spPr>
           <a:xfrm>
-            <a:off x="1512532" y="2308860"/>
+            <a:off x="1512532" y="2217420"/>
             <a:ext cx="694944" cy="694944"/>
           </a:xfrm>
           <a:prstGeom prst="rect">
@@ -2775,12 +2775,12 @@
         </p:nvSpPr>
         <p:spPr>
           <a:xfrm>
-            <a:off x="548640" y="3177540"/>
-            <a:ext cx="2622728" cy="1581912"/>
+            <a:off x="548640" y="3086100"/>
+            <a:ext cx="2622728" cy="1764792"/>
           </a:xfrm>
           <a:prstGeom prst="roundRect">
             <a:avLst>
-              <a:gd name="adj" fmla="val 5780"/>
+              <a:gd name="adj" fmla="val 5181"/>
             </a:avLst>
           </a:prstGeom>
           <a:solidFill>
@@ -2809,8 +2809,8 @@
         </p:nvSpPr>
         <p:spPr>
           <a:xfrm>
-            <a:off x="731520" y="3360420"/>
-            <a:ext cx="2256968" cy="1261872"/>
+            <a:off x="731520" y="3268980"/>
+            <a:ext cx="2256968" cy="1444752"/>
           </a:xfrm>
           <a:prstGeom prst="rect">
             <a:avLst/>
@@ -2834,7 +2834,7 @@
                   <a:srgbClr val="1D2D3E"/>
                 </a:solidFill>
               </a:rPr>
-              <a:t>Gerar artefatos</a:t>
+              <a:t>Ativar e popular</a:t>
             </a:r>
             <a:endParaRPr lang="en-US" sz="1400" dirty="0"/>
           </a:p>
@@ -2848,7 +2848,26 @@
                   <a:srgbClr val="556B82"/>
                 </a:solidFill>
               </a:rPr>
-              <a:t>Rodar a classe geradora do curso (F9) e depois o gerador de dados do pacote.</a:t>
+              <a:t>Ativar os objetos na ordem do </a:t>
+            </a:r>
+            <a:r>
+              <a:rPr lang="en-US" sz="1150" dirty="0">
+                <a:solidFill>
+                  <a:srgbClr val="0064D9"/>
+                </a:solidFill>
+                <a:latin typeface="Courier New" pitchFamily="34" charset="0"/>
+                <a:ea typeface="Courier New" pitchFamily="34" charset="-122"/>
+                <a:cs typeface="Courier New" pitchFamily="34" charset="-120"/>
+              </a:rPr>
+              <a:t>abap/README.md</a:t>
+            </a:r>
+            <a:r>
+              <a:rPr lang="en-US" sz="1150" dirty="0">
+                <a:solidFill>
+                  <a:srgbClr val="556B82"/>
+                </a:solidFill>
+              </a:rPr>
+              <a:t> (seção 8.2) e rodar a classe de setup com dados de demonstração.</a:t>
             </a:r>
             <a:endParaRPr lang="en-US" sz="1400" dirty="0"/>
           </a:p>
@@ -2862,7 +2881,7 @@
         </p:nvSpPr>
         <p:spPr>
           <a:xfrm>
-            <a:off x="4336428" y="2308860"/>
+            <a:off x="4336428" y="2217420"/>
             <a:ext cx="694944" cy="694944"/>
           </a:xfrm>
           <a:prstGeom prst="ellipse">
@@ -2882,7 +2901,7 @@
         </p:nvSpPr>
         <p:spPr>
           <a:xfrm>
-            <a:off x="4336428" y="2308860"/>
+            <a:off x="4336428" y="2217420"/>
             <a:ext cx="694944" cy="694944"/>
           </a:xfrm>
           <a:prstGeom prst="rect">
@@ -2918,12 +2937,12 @@
         </p:nvSpPr>
         <p:spPr>
           <a:xfrm>
-            <a:off x="3372536" y="3177540"/>
-            <a:ext cx="2622728" cy="1581912"/>
+            <a:off x="3372536" y="3086100"/>
+            <a:ext cx="2622728" cy="1764792"/>
           </a:xfrm>
           <a:prstGeom prst="roundRect">
             <a:avLst>
-              <a:gd name="adj" fmla="val 5780"/>
+              <a:gd name="adj" fmla="val 5181"/>
             </a:avLst>
           </a:prstGeom>
           <a:solidFill>
@@ -2952,8 +2971,8 @@
         </p:nvSpPr>
         <p:spPr>
           <a:xfrm>
-            <a:off x="3555416" y="3360420"/>
-            <a:ext cx="2256968" cy="1261872"/>
+            <a:off x="3555416" y="3268980"/>
+            <a:ext cx="2256968" cy="1444752"/>
           </a:xfrm>
           <a:prstGeom prst="rect">
             <a:avLst/>
@@ -2994,7 +3013,7 @@
                 <a:ea typeface="Courier New" pitchFamily="34" charset="-122"/>
                 <a:cs typeface="Courier New" pitchFamily="34" charset="-120"/>
               </a:rPr>
-              <a:t>ZUI_FE_TRAVEL_######_O4</a:t>
+              <a:t>ZUI_PC_PEDIDOS_COMPRAS_O4</a:t>
             </a:r>
             <a:r>
               <a:rPr lang="en-US" sz="1150" dirty="0">
@@ -3032,7 +3051,7 @@
         </p:nvSpPr>
         <p:spPr>
           <a:xfrm>
-            <a:off x="7160324" y="2308860"/>
+            <a:off x="7160324" y="2217420"/>
             <a:ext cx="694944" cy="694944"/>
           </a:xfrm>
           <a:prstGeom prst="ellipse">
@@ -3052,7 +3071,7 @@
         </p:nvSpPr>
         <p:spPr>
           <a:xfrm>
-            <a:off x="7160324" y="2308860"/>
+            <a:off x="7160324" y="2217420"/>
             <a:ext cx="694944" cy="694944"/>
           </a:xfrm>
           <a:prstGeom prst="rect">
@@ -3088,12 +3107,12 @@
         </p:nvSpPr>
         <p:spPr>
           <a:xfrm>
-            <a:off x="6196432" y="3177540"/>
-            <a:ext cx="2622728" cy="1581912"/>
+            <a:off x="6196432" y="3086100"/>
+            <a:ext cx="2622728" cy="1764792"/>
           </a:xfrm>
           <a:prstGeom prst="roundRect">
             <a:avLst>
-              <a:gd name="adj" fmla="val 5780"/>
+              <a:gd name="adj" fmla="val 5181"/>
             </a:avLst>
           </a:prstGeom>
           <a:solidFill>
@@ -3122,8 +3141,8 @@
         </p:nvSpPr>
         <p:spPr>
           <a:xfrm>
-            <a:off x="6379312" y="3360420"/>
-            <a:ext cx="2256968" cy="1261872"/>
+            <a:off x="6379312" y="3268980"/>
+            <a:ext cx="2256968" cy="1444752"/>
           </a:xfrm>
           <a:prstGeom prst="rect">
             <a:avLst/>
@@ -3175,7 +3194,7 @@
         </p:nvSpPr>
         <p:spPr>
           <a:xfrm>
-            <a:off x="9984219" y="2308860"/>
+            <a:off x="9984219" y="2217420"/>
             <a:ext cx="694944" cy="694944"/>
           </a:xfrm>
           <a:prstGeom prst="ellipse">
@@ -3195,7 +3214,7 @@
         </p:nvSpPr>
         <p:spPr>
           <a:xfrm>
-            <a:off x="9984219" y="2308860"/>
+            <a:off x="9984219" y="2217420"/>
             <a:ext cx="694944" cy="694944"/>
           </a:xfrm>
           <a:prstGeom prst="rect">
@@ -3231,12 +3250,12 @@
         </p:nvSpPr>
         <p:spPr>
           <a:xfrm>
-            <a:off x="9020327" y="3177540"/>
-            <a:ext cx="2622728" cy="1581912"/>
+            <a:off x="9020327" y="3086100"/>
+            <a:ext cx="2622728" cy="1764792"/>
           </a:xfrm>
           <a:prstGeom prst="roundRect">
             <a:avLst>
-              <a:gd name="adj" fmla="val 5780"/>
+              <a:gd name="adj" fmla="val 5181"/>
             </a:avLst>
           </a:prstGeom>
           <a:solidFill>
@@ -3265,8 +3284,8 @@
         </p:nvSpPr>
         <p:spPr>
           <a:xfrm>
-            <a:off x="9203207" y="3360420"/>
-            <a:ext cx="2256968" cy="1261872"/>
+            <a:off x="9203207" y="3268980"/>
+            <a:ext cx="2256968" cy="1444752"/>
           </a:xfrm>
           <a:prstGeom prst="rect">
             <a:avLst/>
@@ -3315,7 +3334,7 @@
                 <a:ea typeface="Courier New" pitchFamily="34" charset="-122"/>
                 <a:cs typeface="Courier New" pitchFamily="34" charset="-120"/>
               </a:rPr>
-              <a:t>Travel</a:t>
+              <a:t>Pedido</a:t>
             </a:r>
             <a:r>
               <a:rPr lang="en-US" sz="1150" dirty="0">
@@ -3353,7 +3372,7 @@
         </p:nvSpPr>
         <p:spPr>
           <a:xfrm>
-            <a:off x="548640" y="4942332"/>
+            <a:off x="548640" y="5033772"/>
             <a:ext cx="11094415" cy="566928"/>
           </a:xfrm>
           <a:prstGeom prst="roundRect">
@@ -3375,7 +3394,7 @@
         </p:nvSpPr>
         <p:spPr>
           <a:xfrm>
-            <a:off x="1207008" y="4942332"/>
+            <a:off x="1207008" y="5033772"/>
             <a:ext cx="10225735" cy="566928"/>
           </a:xfrm>
           <a:prstGeom prst="rect">
@@ -3446,7 +3465,7 @@
         </p:blipFill>
         <p:spPr>
           <a:xfrm>
-            <a:off x="749808" y="5070348"/>
+            <a:off x="749808" y="5161788"/>
             <a:ext cx="310896" cy="310896"/>
           </a:xfrm>
           <a:prstGeom prst="rect">
@@ -3590,7 +3609,7 @@
                   <a:srgbClr val="FFFFFF"/>
                 </a:solidFill>
               </a:rPr>
-              <a:t>O que aprendemos na aula 03.02</a:t>
+              <a:t>O que aprendemos na aula 05.02</a:t>
             </a:r>
             <a:endParaRPr lang="en-US" sz="3200" dirty="0"/>
           </a:p>
@@ -4076,7 +4095,7 @@
                   <a:srgbClr val="89D1FF"/>
                 </a:solidFill>
               </a:rPr>
-              <a:t>Próxima aula · 03.03  </a:t>
+              <a:t>Próxima aula · 05.03  </a:t>
             </a:r>
             <a:r>
               <a:rPr lang="en-US" sz="1500" dirty="0">
@@ -4353,7 +4372,7 @@
                   <a:srgbClr val="1D2D3E"/>
                 </a:solidFill>
               </a:rPr>
-              <a:t>Módulo 03 em 11 aulas: Fiori Elements com OData V4</a:t>
+              <a:t>Módulo 05 em 11 aulas: Fiori Elements com OData V4</a:t>
             </a:r>
             <a:endParaRPr lang="en-US" sz="2800" dirty="0"/>
           </a:p>
@@ -6223,7 +6242,7 @@
                   <a:srgbClr val="1D2D3E"/>
                 </a:solidFill>
               </a:rPr>
-              <a:t>publicamos o serviço OData V4 de viagens gerado no curso e abrimos o primeiro preview Fiori elements.</a:t>
+              <a:t>publicamos o serviço OData V4 de pedidos do projeto Pedidos de Compras e abrimos o primeiro preview Fiori elements.</a:t>
             </a:r>
             <a:endParaRPr lang="en-US" sz="1400" dirty="0"/>
           </a:p>
@@ -6245,7 +6264,7 @@
         </p:blipFill>
         <p:spPr>
           <a:xfrm>
-            <a:off x="1696669" y="1847088"/>
+            <a:off x="3576218" y="1847088"/>
             <a:ext cx="347472" cy="347472"/>
           </a:xfrm>
           <a:prstGeom prst="rect">
@@ -6269,7 +6288,7 @@
         </p:blipFill>
         <p:spPr>
           <a:xfrm>
-            <a:off x="3576218" y="1847088"/>
+            <a:off x="1696669" y="1847088"/>
             <a:ext cx="347472" cy="347472"/>
           </a:xfrm>
           <a:prstGeom prst="rect">
@@ -6389,7 +6408,7 @@
         </p:blipFill>
         <p:spPr>
           <a:xfrm>
-            <a:off x="1696669" y="3858768"/>
+            <a:off x="3576218" y="3858768"/>
             <a:ext cx="347472" cy="347472"/>
           </a:xfrm>
           <a:prstGeom prst="rect">
@@ -6413,7 +6432,7 @@
         </p:blipFill>
         <p:spPr>
           <a:xfrm>
-            <a:off x="5455768" y="3858768"/>
+            <a:off x="1696669" y="3858768"/>
             <a:ext cx="347472" cy="347472"/>
           </a:xfrm>
           <a:prstGeom prst="rect">
@@ -6437,7 +6456,7 @@
         </p:blipFill>
         <p:spPr>
           <a:xfrm>
-            <a:off x="3576218" y="3858768"/>
+            <a:off x="5455768" y="3858768"/>
             <a:ext cx="347472" cy="347472"/>
           </a:xfrm>
           <a:prstGeom prst="rect">
@@ -6461,7 +6480,7 @@
         </p:blipFill>
         <p:spPr>
           <a:xfrm>
-            <a:off x="7335317" y="3858768"/>
+            <a:off x="9214866" y="3858768"/>
             <a:ext cx="347472" cy="347472"/>
           </a:xfrm>
           <a:prstGeom prst="rect">
@@ -6485,7 +6504,7 @@
         </p:blipFill>
         <p:spPr>
           <a:xfrm>
-            <a:off x="9214866" y="3858768"/>
+            <a:off x="7335317" y="3858768"/>
             <a:ext cx="347472" cy="347472"/>
           </a:xfrm>
           <a:prstGeom prst="rect">
@@ -7466,7 +7485,7 @@
         </p:blipFill>
         <p:spPr>
           <a:xfrm>
-            <a:off x="1598257" y="2084832"/>
+            <a:off x="4474731" y="2084832"/>
             <a:ext cx="365760" cy="365760"/>
           </a:xfrm>
           <a:prstGeom prst="rect">
@@ -7490,8 +7509,8 @@
         </p:blipFill>
         <p:spPr>
           <a:xfrm>
-            <a:off x="4474731" y="2084832"/>
-            <a:ext cx="365760" cy="365760"/>
+            <a:off x="8368711" y="3928994"/>
+            <a:ext cx="225308" cy="225308"/>
           </a:xfrm>
           <a:prstGeom prst="rect">
             <a:avLst/>
@@ -7514,7 +7533,7 @@
         </p:blipFill>
         <p:spPr>
           <a:xfrm>
-            <a:off x="7351205" y="2084832"/>
+            <a:off x="10227678" y="2084832"/>
             <a:ext cx="365760" cy="365760"/>
           </a:xfrm>
           <a:prstGeom prst="rect">
@@ -7538,7 +7557,7 @@
         </p:blipFill>
         <p:spPr>
           <a:xfrm>
-            <a:off x="10227678" y="2084832"/>
+            <a:off x="1598257" y="2084832"/>
             <a:ext cx="365760" cy="365760"/>
           </a:xfrm>
           <a:prstGeom prst="rect">
@@ -7562,8 +7581,8 @@
         </p:blipFill>
         <p:spPr>
           <a:xfrm>
-            <a:off x="820034" y="3928994"/>
-            <a:ext cx="225308" cy="225308"/>
+            <a:off x="7351205" y="2084832"/>
+            <a:ext cx="365760" cy="365760"/>
           </a:xfrm>
           <a:prstGeom prst="rect">
             <a:avLst/>
@@ -7586,7 +7605,7 @@
         </p:blipFill>
         <p:spPr>
           <a:xfrm>
-            <a:off x="4594372" y="3928994"/>
+            <a:off x="820034" y="3928994"/>
             <a:ext cx="225308" cy="225308"/>
           </a:xfrm>
           <a:prstGeom prst="rect">
@@ -7610,7 +7629,7 @@
         </p:blipFill>
         <p:spPr>
           <a:xfrm>
-            <a:off x="8368711" y="3928994"/>
+            <a:off x="4594372" y="3928994"/>
             <a:ext cx="225308" cy="225308"/>
           </a:xfrm>
           <a:prstGeom prst="rect">
@@ -7740,7 +7759,7 @@
                   <a:srgbClr val="89D1FF"/>
                 </a:solidFill>
               </a:rPr>
-              <a:t>AULA 03.02 · SEÇÃO 1</a:t>
+              <a:t>AULA 05.02 · SEÇÃO 1</a:t>
             </a:r>
             <a:endParaRPr lang="en-US" sz="1300" dirty="0"/>
           </a:p>
@@ -8145,7 +8164,7 @@
                   <a:srgbClr val="0064D9"/>
                 </a:solidFill>
               </a:rPr>
-              <a:t>O QUE EXPOR · EXEMPLO DO CURSO</a:t>
+              <a:t>O QUE EXPOR · NO PROJETO</a:t>
             </a:r>
             <a:endParaRPr lang="en-US" sz="1100" dirty="0"/>
           </a:p>
@@ -8183,7 +8202,7 @@
                   <a:srgbClr val="1D2D3E"/>
                 </a:solidFill>
               </a:rPr>
-              <a:t>A service definition do app de viagens</a:t>
+              <a:t>A service definition do app de pedidos</a:t>
             </a:r>
             <a:endParaRPr lang="en-US" sz="2800" dirty="0"/>
           </a:p>
@@ -8247,7 +8266,7 @@
         <p:spPr>
           <a:xfrm>
             <a:off x="640080" y="1700784"/>
-            <a:ext cx="2542032" cy="292608"/>
+            <a:ext cx="2930652" cy="292608"/>
           </a:xfrm>
           <a:prstGeom prst="rect">
             <a:avLst/>
@@ -8267,7 +8286,7 @@
         <p:spPr>
           <a:xfrm>
             <a:off x="640080" y="1700784"/>
-            <a:ext cx="2542032" cy="27432"/>
+            <a:ext cx="2930652" cy="27432"/>
           </a:xfrm>
           <a:prstGeom prst="rect">
             <a:avLst/>
@@ -8287,7 +8306,7 @@
         <p:spPr>
           <a:xfrm>
             <a:off x="731520" y="1719072"/>
-            <a:ext cx="2359152" cy="274320"/>
+            <a:ext cx="2747772" cy="274320"/>
           </a:xfrm>
           <a:prstGeom prst="rect">
             <a:avLst/>
@@ -8308,7 +8327,7 @@
                   <a:srgbClr val="FFFFFF"/>
                 </a:solidFill>
               </a:rPr>
-              <a:t>zfe_travel_######.srvd.asrvd</a:t>
+              <a:t>zui_pc_pedidos_compras.srvd.asrvd</a:t>
             </a:r>
             <a:endParaRPr lang="en-US" sz="950" dirty="0"/>
           </a:p>
@@ -8344,7 +8363,7 @@
                   <a:srgbClr val="9DA5B4"/>
                 </a:solidFill>
               </a:rPr>
-              <a:t>ZFE_TRAVEL_###### › Business Services</a:t>
+              <a:t>ZAVBS_PC_PEDIDOS › Business Services (reconstruída do $metadata do app)</a:t>
             </a:r>
             <a:endParaRPr lang="en-US" sz="850" dirty="0"/>
           </a:p>
@@ -8570,6 +8589,46 @@
             </a:r>
             <a:endParaRPr lang="en-US" sz="1050" dirty="0"/>
           </a:p>
+          <a:p>
+            <a:pPr algn="r" indent="0" marL="0">
+              <a:lnSpc>
+                <a:spcPct val="105000"/>
+              </a:lnSpc>
+              <a:buNone/>
+            </a:pPr>
+            <a:r>
+              <a:rPr lang="en-US" sz="1050" dirty="0">
+                <a:solidFill>
+                  <a:srgbClr val="6E7681"/>
+                </a:solidFill>
+                <a:latin typeface="Courier New" pitchFamily="34" charset="0"/>
+                <a:ea typeface="Courier New" pitchFamily="34" charset="-122"/>
+                <a:cs typeface="Courier New" pitchFamily="34" charset="-120"/>
+              </a:rPr>
+              <a:t>11</a:t>
+            </a:r>
+            <a:endParaRPr lang="en-US" sz="1050" dirty="0"/>
+          </a:p>
+          <a:p>
+            <a:pPr algn="r" indent="0" marL="0">
+              <a:lnSpc>
+                <a:spcPct val="105000"/>
+              </a:lnSpc>
+              <a:buNone/>
+            </a:pPr>
+            <a:r>
+              <a:rPr lang="en-US" sz="1050" dirty="0">
+                <a:solidFill>
+                  <a:srgbClr val="6E7681"/>
+                </a:solidFill>
+                <a:latin typeface="Courier New" pitchFamily="34" charset="0"/>
+                <a:ea typeface="Courier New" pitchFamily="34" charset="-122"/>
+                <a:cs typeface="Courier New" pitchFamily="34" charset="-120"/>
+              </a:rPr>
+              <a:t>12</a:t>
+            </a:r>
+            <a:endParaRPr lang="en-US" sz="1050" dirty="0"/>
+          </a:p>
         </p:txBody>
       </p:sp>
       <p:sp>
@@ -8674,7 +8733,7 @@
                 <a:ea typeface="Courier New" pitchFamily="34" charset="-122"/>
                 <a:cs typeface="Courier New" pitchFamily="34" charset="-120"/>
               </a:rPr>
-              <a:t>'Service definition for Travel'</a:t>
+              <a:t>'Pedidos de Compras'</a:t>
             </a:r>
             <a:endParaRPr lang="en-US" sz="1050" dirty="0"/>
           </a:p>
@@ -8738,73 +8797,7 @@
                 <a:ea typeface="Courier New" pitchFamily="34" charset="-122"/>
                 <a:cs typeface="Courier New" pitchFamily="34" charset="-120"/>
               </a:rPr>
-              <a:t>ZFE_TRAVEL_</a:t>
-            </a:r>
-            <a:r>
-              <a:rPr lang="en-US" sz="1050" dirty="0">
-                <a:solidFill>
-                  <a:srgbClr val="CCCCCC"/>
-                </a:solidFill>
-                <a:latin typeface="Courier New" pitchFamily="34" charset="0"/>
-                <a:ea typeface="Courier New" pitchFamily="34" charset="-122"/>
-                <a:cs typeface="Courier New" pitchFamily="34" charset="-120"/>
-              </a:rPr>
-              <a:t>#</a:t>
-            </a:r>
-            <a:r>
-              <a:rPr lang="en-US" sz="1050" dirty="0">
-                <a:solidFill>
-                  <a:srgbClr val="CCCCCC"/>
-                </a:solidFill>
-                <a:latin typeface="Courier New" pitchFamily="34" charset="0"/>
-                <a:ea typeface="Courier New" pitchFamily="34" charset="-122"/>
-                <a:cs typeface="Courier New" pitchFamily="34" charset="-120"/>
-              </a:rPr>
-              <a:t>#</a:t>
-            </a:r>
-            <a:r>
-              <a:rPr lang="en-US" sz="1050" dirty="0">
-                <a:solidFill>
-                  <a:srgbClr val="CCCCCC"/>
-                </a:solidFill>
-                <a:latin typeface="Courier New" pitchFamily="34" charset="0"/>
-                <a:ea typeface="Courier New" pitchFamily="34" charset="-122"/>
-                <a:cs typeface="Courier New" pitchFamily="34" charset="-120"/>
-              </a:rPr>
-              <a:t>#</a:t>
-            </a:r>
-            <a:r>
-              <a:rPr lang="en-US" sz="1050" dirty="0">
-                <a:solidFill>
-                  <a:srgbClr val="CCCCCC"/>
-                </a:solidFill>
-                <a:latin typeface="Courier New" pitchFamily="34" charset="0"/>
-                <a:ea typeface="Courier New" pitchFamily="34" charset="-122"/>
-                <a:cs typeface="Courier New" pitchFamily="34" charset="-120"/>
-              </a:rPr>
-              <a:t>#</a:t>
-            </a:r>
-            <a:r>
-              <a:rPr lang="en-US" sz="1050" dirty="0">
-                <a:solidFill>
-                  <a:srgbClr val="CCCCCC"/>
-                </a:solidFill>
-                <a:latin typeface="Courier New" pitchFamily="34" charset="0"/>
-                <a:ea typeface="Courier New" pitchFamily="34" charset="-122"/>
-                <a:cs typeface="Courier New" pitchFamily="34" charset="-120"/>
-              </a:rPr>
-              <a:t>#</a:t>
-            </a:r>
-            <a:r>
-              <a:rPr lang="en-US" sz="1050" dirty="0">
-                <a:solidFill>
-                  <a:srgbClr val="CCCCCC"/>
-                </a:solidFill>
-                <a:latin typeface="Courier New" pitchFamily="34" charset="0"/>
-                <a:ea typeface="Courier New" pitchFamily="34" charset="-122"/>
-                <a:cs typeface="Courier New" pitchFamily="34" charset="-120"/>
-              </a:rPr>
-              <a:t>#</a:t>
+              <a:t>ZUI_PC_PEDIDOS_COMPRAS</a:t>
             </a:r>
             <a:r>
               <a:rPr lang="en-US" sz="1050" dirty="0">
@@ -8879,7 +8872,7 @@
                 <a:ea typeface="Courier New" pitchFamily="34" charset="-122"/>
                 <a:cs typeface="Courier New" pitchFamily="34" charset="-120"/>
               </a:rPr>
-              <a:t>ZC_FE_TRAVEL_</a:t>
+              <a:t>ZC_PC_PEDIDO_APP</a:t>
             </a:r>
             <a:r>
               <a:rPr lang="en-US" sz="1050" dirty="0">
@@ -8890,7 +8883,7 @@
                 <a:ea typeface="Courier New" pitchFamily="34" charset="-122"/>
                 <a:cs typeface="Courier New" pitchFamily="34" charset="-120"/>
               </a:rPr>
-              <a:t>#</a:t>
+              <a:t>      </a:t>
             </a:r>
             <a:r>
               <a:rPr lang="en-US" sz="1050" dirty="0">
@@ -8901,7 +8894,7 @@
                 <a:ea typeface="Courier New" pitchFamily="34" charset="-122"/>
                 <a:cs typeface="Courier New" pitchFamily="34" charset="-120"/>
               </a:rPr>
-              <a:t>#</a:t>
+              <a:t>as</a:t>
             </a:r>
             <a:r>
               <a:rPr lang="en-US" sz="1050" dirty="0">
@@ -8912,7 +8905,7 @@
                 <a:ea typeface="Courier New" pitchFamily="34" charset="-122"/>
                 <a:cs typeface="Courier New" pitchFamily="34" charset="-120"/>
               </a:rPr>
-              <a:t>#</a:t>
+              <a:t> </a:t>
             </a:r>
             <a:r>
               <a:rPr lang="en-US" sz="1050" dirty="0">
@@ -8923,73 +8916,7 @@
                 <a:ea typeface="Courier New" pitchFamily="34" charset="-122"/>
                 <a:cs typeface="Courier New" pitchFamily="34" charset="-120"/>
               </a:rPr>
-              <a:t>#</a:t>
-            </a:r>
-            <a:r>
-              <a:rPr lang="en-US" sz="1050" dirty="0">
-                <a:solidFill>
-                  <a:srgbClr val="CCCCCC"/>
-                </a:solidFill>
-                <a:latin typeface="Courier New" pitchFamily="34" charset="0"/>
-                <a:ea typeface="Courier New" pitchFamily="34" charset="-122"/>
-                <a:cs typeface="Courier New" pitchFamily="34" charset="-120"/>
-              </a:rPr>
-              <a:t>#</a:t>
-            </a:r>
-            <a:r>
-              <a:rPr lang="en-US" sz="1050" dirty="0">
-                <a:solidFill>
-                  <a:srgbClr val="CCCCCC"/>
-                </a:solidFill>
-                <a:latin typeface="Courier New" pitchFamily="34" charset="0"/>
-                <a:ea typeface="Courier New" pitchFamily="34" charset="-122"/>
-                <a:cs typeface="Courier New" pitchFamily="34" charset="-120"/>
-              </a:rPr>
-              <a:t>#</a:t>
-            </a:r>
-            <a:r>
-              <a:rPr lang="en-US" sz="1050" dirty="0">
-                <a:solidFill>
-                  <a:srgbClr val="CCCCCC"/>
-                </a:solidFill>
-                <a:latin typeface="Courier New" pitchFamily="34" charset="0"/>
-                <a:ea typeface="Courier New" pitchFamily="34" charset="-122"/>
-                <a:cs typeface="Courier New" pitchFamily="34" charset="-120"/>
-              </a:rPr>
-              <a:t>  </a:t>
-            </a:r>
-            <a:r>
-              <a:rPr lang="en-US" sz="1050" dirty="0">
-                <a:solidFill>
-                  <a:srgbClr val="CCCCCC"/>
-                </a:solidFill>
-                <a:latin typeface="Courier New" pitchFamily="34" charset="0"/>
-                <a:ea typeface="Courier New" pitchFamily="34" charset="-122"/>
-                <a:cs typeface="Courier New" pitchFamily="34" charset="-120"/>
-              </a:rPr>
-              <a:t>as</a:t>
-            </a:r>
-            <a:r>
-              <a:rPr lang="en-US" sz="1050" dirty="0">
-                <a:solidFill>
-                  <a:srgbClr val="CCCCCC"/>
-                </a:solidFill>
-                <a:latin typeface="Courier New" pitchFamily="34" charset="0"/>
-                <a:ea typeface="Courier New" pitchFamily="34" charset="-122"/>
-                <a:cs typeface="Courier New" pitchFamily="34" charset="-120"/>
-              </a:rPr>
-              <a:t> </a:t>
-            </a:r>
-            <a:r>
-              <a:rPr lang="en-US" sz="1050" dirty="0">
-                <a:solidFill>
-                  <a:srgbClr val="CCCCCC"/>
-                </a:solidFill>
-                <a:latin typeface="Courier New" pitchFamily="34" charset="0"/>
-                <a:ea typeface="Courier New" pitchFamily="34" charset="-122"/>
-                <a:cs typeface="Courier New" pitchFamily="34" charset="-120"/>
-              </a:rPr>
-              <a:t>Travel</a:t>
+              <a:t>Pedido</a:t>
             </a:r>
             <a:r>
               <a:rPr lang="en-US" sz="1050" dirty="0">
@@ -9053,7 +8980,7 @@
                 <a:ea typeface="Courier New" pitchFamily="34" charset="-122"/>
                 <a:cs typeface="Courier New" pitchFamily="34" charset="-120"/>
               </a:rPr>
-              <a:t>ZC_FE_BOOKING_</a:t>
+              <a:t>ZC_PC_ITEM_PEDIDO_APP</a:t>
             </a:r>
             <a:r>
               <a:rPr lang="en-US" sz="1050" dirty="0">
@@ -9064,7 +8991,7 @@
                 <a:ea typeface="Courier New" pitchFamily="34" charset="-122"/>
                 <a:cs typeface="Courier New" pitchFamily="34" charset="-120"/>
               </a:rPr>
-              <a:t>#</a:t>
+              <a:t> </a:t>
             </a:r>
             <a:r>
               <a:rPr lang="en-US" sz="1050" dirty="0">
@@ -9075,7 +9002,7 @@
                 <a:ea typeface="Courier New" pitchFamily="34" charset="-122"/>
                 <a:cs typeface="Courier New" pitchFamily="34" charset="-120"/>
               </a:rPr>
-              <a:t>#</a:t>
+              <a:t>as</a:t>
             </a:r>
             <a:r>
               <a:rPr lang="en-US" sz="1050" dirty="0">
@@ -9086,7 +9013,7 @@
                 <a:ea typeface="Courier New" pitchFamily="34" charset="-122"/>
                 <a:cs typeface="Courier New" pitchFamily="34" charset="-120"/>
               </a:rPr>
-              <a:t>#</a:t>
+              <a:t> </a:t>
             </a:r>
             <a:r>
               <a:rPr lang="en-US" sz="1050" dirty="0">
@@ -9097,73 +9024,7 @@
                 <a:ea typeface="Courier New" pitchFamily="34" charset="-122"/>
                 <a:cs typeface="Courier New" pitchFamily="34" charset="-120"/>
               </a:rPr>
-              <a:t>#</a:t>
-            </a:r>
-            <a:r>
-              <a:rPr lang="en-US" sz="1050" dirty="0">
-                <a:solidFill>
-                  <a:srgbClr val="CCCCCC"/>
-                </a:solidFill>
-                <a:latin typeface="Courier New" pitchFamily="34" charset="0"/>
-                <a:ea typeface="Courier New" pitchFamily="34" charset="-122"/>
-                <a:cs typeface="Courier New" pitchFamily="34" charset="-120"/>
-              </a:rPr>
-              <a:t>#</a:t>
-            </a:r>
-            <a:r>
-              <a:rPr lang="en-US" sz="1050" dirty="0">
-                <a:solidFill>
-                  <a:srgbClr val="CCCCCC"/>
-                </a:solidFill>
-                <a:latin typeface="Courier New" pitchFamily="34" charset="0"/>
-                <a:ea typeface="Courier New" pitchFamily="34" charset="-122"/>
-                <a:cs typeface="Courier New" pitchFamily="34" charset="-120"/>
-              </a:rPr>
-              <a:t>#</a:t>
-            </a:r>
-            <a:r>
-              <a:rPr lang="en-US" sz="1050" dirty="0">
-                <a:solidFill>
-                  <a:srgbClr val="CCCCCC"/>
-                </a:solidFill>
-                <a:latin typeface="Courier New" pitchFamily="34" charset="0"/>
-                <a:ea typeface="Courier New" pitchFamily="34" charset="-122"/>
-                <a:cs typeface="Courier New" pitchFamily="34" charset="-120"/>
-              </a:rPr>
-              <a:t> </a:t>
-            </a:r>
-            <a:r>
-              <a:rPr lang="en-US" sz="1050" dirty="0">
-                <a:solidFill>
-                  <a:srgbClr val="CCCCCC"/>
-                </a:solidFill>
-                <a:latin typeface="Courier New" pitchFamily="34" charset="0"/>
-                <a:ea typeface="Courier New" pitchFamily="34" charset="-122"/>
-                <a:cs typeface="Courier New" pitchFamily="34" charset="-120"/>
-              </a:rPr>
-              <a:t>as</a:t>
-            </a:r>
-            <a:r>
-              <a:rPr lang="en-US" sz="1050" dirty="0">
-                <a:solidFill>
-                  <a:srgbClr val="CCCCCC"/>
-                </a:solidFill>
-                <a:latin typeface="Courier New" pitchFamily="34" charset="0"/>
-                <a:ea typeface="Courier New" pitchFamily="34" charset="-122"/>
-                <a:cs typeface="Courier New" pitchFamily="34" charset="-120"/>
-              </a:rPr>
-              <a:t> </a:t>
-            </a:r>
-            <a:r>
-              <a:rPr lang="en-US" sz="1050" dirty="0">
-                <a:solidFill>
-                  <a:srgbClr val="CCCCCC"/>
-                </a:solidFill>
-                <a:latin typeface="Courier New" pitchFamily="34" charset="0"/>
-                <a:ea typeface="Courier New" pitchFamily="34" charset="-122"/>
-                <a:cs typeface="Courier New" pitchFamily="34" charset="-120"/>
-              </a:rPr>
-              <a:t>Booking</a:t>
+              <a:t>ItemPedido</a:t>
             </a:r>
             <a:r>
               <a:rPr lang="en-US" sz="1050" dirty="0">
@@ -9188,13 +9049,101 @@
             <a:r>
               <a:rPr lang="en-US" sz="1050" dirty="0">
                 <a:solidFill>
-                  <a:srgbClr val="000000"/>
+                  <a:srgbClr val="CCCCCC"/>
                 </a:solidFill>
                 <a:latin typeface="Courier New" pitchFamily="34" charset="0"/>
                 <a:ea typeface="Courier New" pitchFamily="34" charset="-122"/>
                 <a:cs typeface="Courier New" pitchFamily="34" charset="-120"/>
               </a:rPr>
+              <a:t>  </a:t>
+            </a:r>
+            <a:r>
+              <a:rPr lang="en-US" sz="1050" dirty="0">
+                <a:solidFill>
+                  <a:srgbClr val="CCCCCC"/>
+                </a:solidFill>
+                <a:latin typeface="Courier New" pitchFamily="34" charset="0"/>
+                <a:ea typeface="Courier New" pitchFamily="34" charset="-122"/>
+                <a:cs typeface="Courier New" pitchFamily="34" charset="-120"/>
+              </a:rPr>
+              <a:t>expose</a:t>
+            </a:r>
+            <a:r>
+              <a:rPr lang="en-US" sz="1050" dirty="0">
+                <a:solidFill>
+                  <a:srgbClr val="CCCCCC"/>
+                </a:solidFill>
+                <a:latin typeface="Courier New" pitchFamily="34" charset="0"/>
+                <a:ea typeface="Courier New" pitchFamily="34" charset="-122"/>
+                <a:cs typeface="Courier New" pitchFamily="34" charset="-120"/>
+              </a:rPr>
               <a:t> </a:t>
+            </a:r>
+            <a:r>
+              <a:rPr lang="en-US" sz="1050" dirty="0">
+                <a:solidFill>
+                  <a:srgbClr val="CCCCCC"/>
+                </a:solidFill>
+                <a:latin typeface="Courier New" pitchFamily="34" charset="0"/>
+                <a:ea typeface="Courier New" pitchFamily="34" charset="-122"/>
+                <a:cs typeface="Courier New" pitchFamily="34" charset="-120"/>
+              </a:rPr>
+              <a:t>ZC_PC_PAGAMENTO_APP</a:t>
+            </a:r>
+            <a:r>
+              <a:rPr lang="en-US" sz="1050" dirty="0">
+                <a:solidFill>
+                  <a:srgbClr val="CCCCCC"/>
+                </a:solidFill>
+                <a:latin typeface="Courier New" pitchFamily="34" charset="0"/>
+                <a:ea typeface="Courier New" pitchFamily="34" charset="-122"/>
+                <a:cs typeface="Courier New" pitchFamily="34" charset="-120"/>
+              </a:rPr>
+              <a:t>   </a:t>
+            </a:r>
+            <a:r>
+              <a:rPr lang="en-US" sz="1050" dirty="0">
+                <a:solidFill>
+                  <a:srgbClr val="CCCCCC"/>
+                </a:solidFill>
+                <a:latin typeface="Courier New" pitchFamily="34" charset="0"/>
+                <a:ea typeface="Courier New" pitchFamily="34" charset="-122"/>
+                <a:cs typeface="Courier New" pitchFamily="34" charset="-120"/>
+              </a:rPr>
+              <a:t>as</a:t>
+            </a:r>
+            <a:r>
+              <a:rPr lang="en-US" sz="1050" dirty="0">
+                <a:solidFill>
+                  <a:srgbClr val="CCCCCC"/>
+                </a:solidFill>
+                <a:latin typeface="Courier New" pitchFamily="34" charset="0"/>
+                <a:ea typeface="Courier New" pitchFamily="34" charset="-122"/>
+                <a:cs typeface="Courier New" pitchFamily="34" charset="-120"/>
+              </a:rPr>
+              <a:t> </a:t>
+            </a:r>
+            <a:r>
+              <a:rPr lang="en-US" sz="1050" dirty="0">
+                <a:solidFill>
+                  <a:srgbClr val="CCCCCC"/>
+                </a:solidFill>
+                <a:latin typeface="Courier New" pitchFamily="34" charset="0"/>
+                <a:ea typeface="Courier New" pitchFamily="34" charset="-122"/>
+                <a:cs typeface="Courier New" pitchFamily="34" charset="-120"/>
+              </a:rPr>
+              <a:t>Pagamento</a:t>
+            </a:r>
+            <a:r>
+              <a:rPr lang="en-US" sz="1050" dirty="0">
+                <a:solidFill>
+                  <a:srgbClr val="CCCCCC"/>
+                </a:solidFill>
+                <a:latin typeface="Courier New" pitchFamily="34" charset="0"/>
+                <a:ea typeface="Courier New" pitchFamily="34" charset="-122"/>
+                <a:cs typeface="Courier New" pitchFamily="34" charset="-120"/>
+              </a:rPr>
+              <a:t>;</a:t>
             </a:r>
             <a:endParaRPr lang="en-US" sz="1050" dirty="0"/>
           </a:p>
@@ -9208,178 +9157,13 @@
             <a:r>
               <a:rPr lang="en-US" sz="1050" dirty="0">
                 <a:solidFill>
-                  <a:srgbClr val="CCCCCC"/>
+                  <a:srgbClr val="000000"/>
                 </a:solidFill>
                 <a:latin typeface="Courier New" pitchFamily="34" charset="0"/>
                 <a:ea typeface="Courier New" pitchFamily="34" charset="-122"/>
                 <a:cs typeface="Courier New" pitchFamily="34" charset="-120"/>
               </a:rPr>
-              <a:t>  </a:t>
-            </a:r>
-            <a:r>
-              <a:rPr lang="en-US" sz="1050" dirty="0">
-                <a:solidFill>
-                  <a:srgbClr val="CCCCCC"/>
-                </a:solidFill>
-                <a:latin typeface="Courier New" pitchFamily="34" charset="0"/>
-                <a:ea typeface="Courier New" pitchFamily="34" charset="-122"/>
-                <a:cs typeface="Courier New" pitchFamily="34" charset="-120"/>
-              </a:rPr>
-              <a:t>//</a:t>
-            </a:r>
-            <a:r>
-              <a:rPr lang="en-US" sz="1050" dirty="0">
-                <a:solidFill>
-                  <a:srgbClr val="CCCCCC"/>
-                </a:solidFill>
-                <a:latin typeface="Courier New" pitchFamily="34" charset="0"/>
-                <a:ea typeface="Courier New" pitchFamily="34" charset="-122"/>
-                <a:cs typeface="Courier New" pitchFamily="34" charset="-120"/>
-              </a:rPr>
               <a:t> </a:t>
-            </a:r>
-            <a:r>
-              <a:rPr lang="en-US" sz="1050" dirty="0">
-                <a:solidFill>
-                  <a:srgbClr val="CCCCCC"/>
-                </a:solidFill>
-                <a:latin typeface="Courier New" pitchFamily="34" charset="0"/>
-                <a:ea typeface="Courier New" pitchFamily="34" charset="-122"/>
-                <a:cs typeface="Courier New" pitchFamily="34" charset="-120"/>
-              </a:rPr>
-              <a:t>value</a:t>
-            </a:r>
-            <a:r>
-              <a:rPr lang="en-US" sz="1050" dirty="0">
-                <a:solidFill>
-                  <a:srgbClr val="CCCCCC"/>
-                </a:solidFill>
-                <a:latin typeface="Courier New" pitchFamily="34" charset="0"/>
-                <a:ea typeface="Courier New" pitchFamily="34" charset="-122"/>
-                <a:cs typeface="Courier New" pitchFamily="34" charset="-120"/>
-              </a:rPr>
-              <a:t> </a:t>
-            </a:r>
-            <a:r>
-              <a:rPr lang="en-US" sz="1050" dirty="0">
-                <a:solidFill>
-                  <a:srgbClr val="CCCCCC"/>
-                </a:solidFill>
-                <a:latin typeface="Courier New" pitchFamily="34" charset="0"/>
-                <a:ea typeface="Courier New" pitchFamily="34" charset="-122"/>
-                <a:cs typeface="Courier New" pitchFamily="34" charset="-120"/>
-              </a:rPr>
-              <a:t>helps</a:t>
-            </a:r>
-            <a:r>
-              <a:rPr lang="en-US" sz="1050" dirty="0">
-                <a:solidFill>
-                  <a:srgbClr val="CCCCCC"/>
-                </a:solidFill>
-                <a:latin typeface="Courier New" pitchFamily="34" charset="0"/>
-                <a:ea typeface="Courier New" pitchFamily="34" charset="-122"/>
-                <a:cs typeface="Courier New" pitchFamily="34" charset="-120"/>
-              </a:rPr>
-              <a:t> </a:t>
-            </a:r>
-            <a:r>
-              <a:rPr lang="en-US" sz="1050" dirty="0">
-                <a:solidFill>
-                  <a:srgbClr val="CCCCCC"/>
-                </a:solidFill>
-                <a:latin typeface="Courier New" pitchFamily="34" charset="0"/>
-                <a:ea typeface="Courier New" pitchFamily="34" charset="-122"/>
-                <a:cs typeface="Courier New" pitchFamily="34" charset="-120"/>
-              </a:rPr>
-              <a:t>e</a:t>
-            </a:r>
-            <a:r>
-              <a:rPr lang="en-US" sz="1050" dirty="0">
-                <a:solidFill>
-                  <a:srgbClr val="CCCCCC"/>
-                </a:solidFill>
-                <a:latin typeface="Courier New" pitchFamily="34" charset="0"/>
-                <a:ea typeface="Courier New" pitchFamily="34" charset="-122"/>
-                <a:cs typeface="Courier New" pitchFamily="34" charset="-120"/>
-              </a:rPr>
-              <a:t> </a:t>
-            </a:r>
-            <a:r>
-              <a:rPr lang="en-US" sz="1050" dirty="0">
-                <a:solidFill>
-                  <a:srgbClr val="CCCCCC"/>
-                </a:solidFill>
-                <a:latin typeface="Courier New" pitchFamily="34" charset="0"/>
-                <a:ea typeface="Courier New" pitchFamily="34" charset="-122"/>
-                <a:cs typeface="Courier New" pitchFamily="34" charset="-120"/>
-              </a:rPr>
-              <a:t>textos</a:t>
-            </a:r>
-            <a:r>
-              <a:rPr lang="en-US" sz="1050" dirty="0">
-                <a:solidFill>
-                  <a:srgbClr val="CCCCCC"/>
-                </a:solidFill>
-                <a:latin typeface="Courier New" pitchFamily="34" charset="0"/>
-                <a:ea typeface="Courier New" pitchFamily="34" charset="-122"/>
-                <a:cs typeface="Courier New" pitchFamily="34" charset="-120"/>
-              </a:rPr>
-              <a:t> </a:t>
-            </a:r>
-            <a:r>
-              <a:rPr lang="en-US" sz="1050" dirty="0">
-                <a:solidFill>
-                  <a:srgbClr val="CCCCCC"/>
-                </a:solidFill>
-                <a:latin typeface="Courier New" pitchFamily="34" charset="0"/>
-                <a:ea typeface="Courier New" pitchFamily="34" charset="-122"/>
-                <a:cs typeface="Courier New" pitchFamily="34" charset="-120"/>
-              </a:rPr>
-              <a:t>usados</a:t>
-            </a:r>
-            <a:r>
-              <a:rPr lang="en-US" sz="1050" dirty="0">
-                <a:solidFill>
-                  <a:srgbClr val="CCCCCC"/>
-                </a:solidFill>
-                <a:latin typeface="Courier New" pitchFamily="34" charset="0"/>
-                <a:ea typeface="Courier New" pitchFamily="34" charset="-122"/>
-                <a:cs typeface="Courier New" pitchFamily="34" charset="-120"/>
-              </a:rPr>
-              <a:t> </a:t>
-            </a:r>
-            <a:r>
-              <a:rPr lang="en-US" sz="1050" dirty="0">
-                <a:solidFill>
-                  <a:srgbClr val="CCCCCC"/>
-                </a:solidFill>
-                <a:latin typeface="Courier New" pitchFamily="34" charset="0"/>
-                <a:ea typeface="Courier New" pitchFamily="34" charset="-122"/>
-                <a:cs typeface="Courier New" pitchFamily="34" charset="-120"/>
-              </a:rPr>
-              <a:t>pela</a:t>
-            </a:r>
-            <a:r>
-              <a:rPr lang="en-US" sz="1050" dirty="0">
-                <a:solidFill>
-                  <a:srgbClr val="CCCCCC"/>
-                </a:solidFill>
-                <a:latin typeface="Courier New" pitchFamily="34" charset="0"/>
-                <a:ea typeface="Courier New" pitchFamily="34" charset="-122"/>
-                <a:cs typeface="Courier New" pitchFamily="34" charset="-120"/>
-              </a:rPr>
-              <a:t> </a:t>
-            </a:r>
-            <a:r>
-              <a:rPr lang="en-US" sz="1050" dirty="0">
-                <a:solidFill>
-                  <a:srgbClr val="CCCCCC"/>
-                </a:solidFill>
-                <a:latin typeface="Courier New" pitchFamily="34" charset="0"/>
-                <a:ea typeface="Courier New" pitchFamily="34" charset="-122"/>
-                <a:cs typeface="Courier New" pitchFamily="34" charset="-120"/>
-              </a:rPr>
-              <a:t>UI</a:t>
             </a:r>
             <a:endParaRPr lang="en-US" sz="1050" dirty="0"/>
           </a:p>
@@ -9410,7 +9194,7 @@
                 <a:ea typeface="Courier New" pitchFamily="34" charset="-122"/>
                 <a:cs typeface="Courier New" pitchFamily="34" charset="-120"/>
               </a:rPr>
-              <a:t>expose</a:t>
+              <a:t>//</a:t>
             </a:r>
             <a:r>
               <a:rPr lang="en-US" sz="1050" dirty="0">
@@ -9426,13 +9210,13 @@
             <a:r>
               <a:rPr lang="en-US" sz="1050" dirty="0">
                 <a:solidFill>
-                  <a:srgbClr val="4EC9B0"/>
+                  <a:srgbClr val="CCCCCC"/>
                 </a:solidFill>
                 <a:latin typeface="Courier New" pitchFamily="34" charset="0"/>
                 <a:ea typeface="Courier New" pitchFamily="34" charset="-122"/>
                 <a:cs typeface="Courier New" pitchFamily="34" charset="-120"/>
               </a:rPr>
-              <a:t>/DMO/I_Agency</a:t>
+              <a:t>value</a:t>
             </a:r>
             <a:r>
               <a:rPr lang="en-US" sz="1050" dirty="0">
@@ -9443,7 +9227,7 @@
                 <a:ea typeface="Courier New" pitchFamily="34" charset="-122"/>
                 <a:cs typeface="Courier New" pitchFamily="34" charset="-120"/>
               </a:rPr>
-              <a:t>        </a:t>
+              <a:t> </a:t>
             </a:r>
             <a:r>
               <a:rPr lang="en-US" sz="1050" dirty="0">
@@ -9454,7 +9238,7 @@
                 <a:ea typeface="Courier New" pitchFamily="34" charset="-122"/>
                 <a:cs typeface="Courier New" pitchFamily="34" charset="-120"/>
               </a:rPr>
-              <a:t>as</a:t>
+              <a:t>helps</a:t>
             </a:r>
             <a:r>
               <a:rPr lang="en-US" sz="1050" dirty="0">
@@ -9476,7 +9260,7 @@
                 <a:ea typeface="Courier New" pitchFamily="34" charset="-122"/>
                 <a:cs typeface="Courier New" pitchFamily="34" charset="-120"/>
               </a:rPr>
-              <a:t>Agency</a:t>
+              <a:t>usados</a:t>
             </a:r>
             <a:r>
               <a:rPr lang="en-US" sz="1050" dirty="0">
@@ -9487,7 +9271,40 @@
                 <a:ea typeface="Courier New" pitchFamily="34" charset="-122"/>
                 <a:cs typeface="Courier New" pitchFamily="34" charset="-120"/>
               </a:rPr>
-              <a:t>;</a:t>
+              <a:t> </a:t>
+            </a:r>
+            <a:r>
+              <a:rPr lang="en-US" sz="1050" dirty="0">
+                <a:solidFill>
+                  <a:srgbClr val="CCCCCC"/>
+                </a:solidFill>
+                <a:latin typeface="Courier New" pitchFamily="34" charset="0"/>
+                <a:ea typeface="Courier New" pitchFamily="34" charset="-122"/>
+                <a:cs typeface="Courier New" pitchFamily="34" charset="-120"/>
+              </a:rPr>
+              <a:t>pela</a:t>
+            </a:r>
+            <a:r>
+              <a:rPr lang="en-US" sz="1050" dirty="0">
+                <a:solidFill>
+                  <a:srgbClr val="CCCCCC"/>
+                </a:solidFill>
+                <a:latin typeface="Courier New" pitchFamily="34" charset="0"/>
+                <a:ea typeface="Courier New" pitchFamily="34" charset="-122"/>
+                <a:cs typeface="Courier New" pitchFamily="34" charset="-120"/>
+              </a:rPr>
+              <a:t> </a:t>
+            </a:r>
+            <a:r>
+              <a:rPr lang="en-US" sz="1050" dirty="0">
+                <a:solidFill>
+                  <a:srgbClr val="CCCCCC"/>
+                </a:solidFill>
+                <a:latin typeface="Courier New" pitchFamily="34" charset="0"/>
+                <a:ea typeface="Courier New" pitchFamily="34" charset="-122"/>
+                <a:cs typeface="Courier New" pitchFamily="34" charset="-120"/>
+              </a:rPr>
+              <a:t>UI</a:t>
             </a:r>
             <a:endParaRPr lang="en-US" sz="1050" dirty="0"/>
           </a:p>
@@ -9534,13 +9351,13 @@
             <a:r>
               <a:rPr lang="en-US" sz="1050" dirty="0">
                 <a:solidFill>
-                  <a:srgbClr val="4EC9B0"/>
+                  <a:srgbClr val="CCCCCC"/>
                 </a:solidFill>
                 <a:latin typeface="Courier New" pitchFamily="34" charset="0"/>
                 <a:ea typeface="Courier New" pitchFamily="34" charset="-122"/>
                 <a:cs typeface="Courier New" pitchFamily="34" charset="-120"/>
               </a:rPr>
-              <a:t>/DMO/I_Customer</a:t>
+              <a:t>ZC_PC_CLIENTE_VH</a:t>
             </a:r>
             <a:r>
               <a:rPr lang="en-US" sz="1050" dirty="0">
@@ -9584,7 +9401,7 @@
                 <a:ea typeface="Courier New" pitchFamily="34" charset="-122"/>
                 <a:cs typeface="Courier New" pitchFamily="34" charset="-120"/>
               </a:rPr>
-              <a:t>Customer</a:t>
+              <a:t>ClienteVH</a:t>
             </a:r>
             <a:r>
               <a:rPr lang="en-US" sz="1050" dirty="0">
@@ -9648,7 +9465,7 @@
                 <a:ea typeface="Courier New" pitchFamily="34" charset="-122"/>
                 <a:cs typeface="Courier New" pitchFamily="34" charset="-120"/>
               </a:rPr>
-              <a:t>I_Currency</a:t>
+              <a:t>ZC_PC_ITEM_VH</a:t>
             </a:r>
             <a:r>
               <a:rPr lang="en-US" sz="1050" dirty="0">
@@ -9659,7 +9476,7 @@
                 <a:ea typeface="Courier New" pitchFamily="34" charset="-122"/>
                 <a:cs typeface="Courier New" pitchFamily="34" charset="-120"/>
               </a:rPr>
-              <a:t>           </a:t>
+              <a:t>         </a:t>
             </a:r>
             <a:r>
               <a:rPr lang="en-US" sz="1050" dirty="0">
@@ -9692,7 +9509,7 @@
                 <a:ea typeface="Courier New" pitchFamily="34" charset="-122"/>
                 <a:cs typeface="Courier New" pitchFamily="34" charset="-120"/>
               </a:rPr>
-              <a:t>Currency</a:t>
+              <a:t>ItemVH</a:t>
             </a:r>
             <a:r>
               <a:rPr lang="en-US" sz="1050" dirty="0">
@@ -9704,6 +9521,310 @@
                 <a:cs typeface="Courier New" pitchFamily="34" charset="-120"/>
               </a:rPr>
               <a:t>;</a:t>
+            </a:r>
+            <a:endParaRPr lang="en-US" sz="1050" dirty="0"/>
+          </a:p>
+          <a:p>
+            <a:pPr indent="0" marL="0">
+              <a:lnSpc>
+                <a:spcPct val="105000"/>
+              </a:lnSpc>
+              <a:buNone/>
+            </a:pPr>
+            <a:r>
+              <a:rPr lang="en-US" sz="1050" dirty="0">
+                <a:solidFill>
+                  <a:srgbClr val="CCCCCC"/>
+                </a:solidFill>
+                <a:latin typeface="Courier New" pitchFamily="34" charset="0"/>
+                <a:ea typeface="Courier New" pitchFamily="34" charset="-122"/>
+                <a:cs typeface="Courier New" pitchFamily="34" charset="-120"/>
+              </a:rPr>
+              <a:t>  </a:t>
+            </a:r>
+            <a:r>
+              <a:rPr lang="en-US" sz="1050" dirty="0">
+                <a:solidFill>
+                  <a:srgbClr val="CCCCCC"/>
+                </a:solidFill>
+                <a:latin typeface="Courier New" pitchFamily="34" charset="0"/>
+                <a:ea typeface="Courier New" pitchFamily="34" charset="-122"/>
+                <a:cs typeface="Courier New" pitchFamily="34" charset="-120"/>
+              </a:rPr>
+              <a:t>expose</a:t>
+            </a:r>
+            <a:r>
+              <a:rPr lang="en-US" sz="1050" dirty="0">
+                <a:solidFill>
+                  <a:srgbClr val="CCCCCC"/>
+                </a:solidFill>
+                <a:latin typeface="Courier New" pitchFamily="34" charset="0"/>
+                <a:ea typeface="Courier New" pitchFamily="34" charset="-122"/>
+                <a:cs typeface="Courier New" pitchFamily="34" charset="-120"/>
+              </a:rPr>
+              <a:t> </a:t>
+            </a:r>
+            <a:r>
+              <a:rPr lang="en-US" sz="1050" dirty="0">
+                <a:solidFill>
+                  <a:srgbClr val="CCCCCC"/>
+                </a:solidFill>
+                <a:latin typeface="Courier New" pitchFamily="34" charset="0"/>
+                <a:ea typeface="Courier New" pitchFamily="34" charset="-122"/>
+                <a:cs typeface="Courier New" pitchFamily="34" charset="-120"/>
+              </a:rPr>
+              <a:t>ZC_PC_STATUSPED_VH</a:t>
+            </a:r>
+            <a:r>
+              <a:rPr lang="en-US" sz="1050" dirty="0">
+                <a:solidFill>
+                  <a:srgbClr val="CCCCCC"/>
+                </a:solidFill>
+                <a:latin typeface="Courier New" pitchFamily="34" charset="0"/>
+                <a:ea typeface="Courier New" pitchFamily="34" charset="-122"/>
+                <a:cs typeface="Courier New" pitchFamily="34" charset="-120"/>
+              </a:rPr>
+              <a:t>    </a:t>
+            </a:r>
+            <a:r>
+              <a:rPr lang="en-US" sz="1050" dirty="0">
+                <a:solidFill>
+                  <a:srgbClr val="CCCCCC"/>
+                </a:solidFill>
+                <a:latin typeface="Courier New" pitchFamily="34" charset="0"/>
+                <a:ea typeface="Courier New" pitchFamily="34" charset="-122"/>
+                <a:cs typeface="Courier New" pitchFamily="34" charset="-120"/>
+              </a:rPr>
+              <a:t>as</a:t>
+            </a:r>
+            <a:r>
+              <a:rPr lang="en-US" sz="1050" dirty="0">
+                <a:solidFill>
+                  <a:srgbClr val="CCCCCC"/>
+                </a:solidFill>
+                <a:latin typeface="Courier New" pitchFamily="34" charset="0"/>
+                <a:ea typeface="Courier New" pitchFamily="34" charset="-122"/>
+                <a:cs typeface="Courier New" pitchFamily="34" charset="-120"/>
+              </a:rPr>
+              <a:t> </a:t>
+            </a:r>
+            <a:r>
+              <a:rPr lang="en-US" sz="1050" dirty="0">
+                <a:solidFill>
+                  <a:srgbClr val="CCCCCC"/>
+                </a:solidFill>
+                <a:latin typeface="Courier New" pitchFamily="34" charset="0"/>
+                <a:ea typeface="Courier New" pitchFamily="34" charset="-122"/>
+                <a:cs typeface="Courier New" pitchFamily="34" charset="-120"/>
+              </a:rPr>
+              <a:t>StatusPedidoVH</a:t>
+            </a:r>
+            <a:r>
+              <a:rPr lang="en-US" sz="1050" dirty="0">
+                <a:solidFill>
+                  <a:srgbClr val="CCCCCC"/>
+                </a:solidFill>
+                <a:latin typeface="Courier New" pitchFamily="34" charset="0"/>
+                <a:ea typeface="Courier New" pitchFamily="34" charset="-122"/>
+                <a:cs typeface="Courier New" pitchFamily="34" charset="-120"/>
+              </a:rPr>
+              <a:t>;</a:t>
+            </a:r>
+            <a:endParaRPr lang="en-US" sz="1050" dirty="0"/>
+          </a:p>
+          <a:p>
+            <a:pPr indent="0" marL="0">
+              <a:lnSpc>
+                <a:spcPct val="105000"/>
+              </a:lnSpc>
+              <a:buNone/>
+            </a:pPr>
+            <a:r>
+              <a:rPr lang="en-US" sz="1050" dirty="0">
+                <a:solidFill>
+                  <a:srgbClr val="CCCCCC"/>
+                </a:solidFill>
+                <a:latin typeface="Courier New" pitchFamily="34" charset="0"/>
+                <a:ea typeface="Courier New" pitchFamily="34" charset="-122"/>
+                <a:cs typeface="Courier New" pitchFamily="34" charset="-120"/>
+              </a:rPr>
+              <a:t>  </a:t>
+            </a:r>
+            <a:r>
+              <a:rPr lang="en-US" sz="1050" dirty="0">
+                <a:solidFill>
+                  <a:srgbClr val="CCCCCC"/>
+                </a:solidFill>
+                <a:latin typeface="Courier New" pitchFamily="34" charset="0"/>
+                <a:ea typeface="Courier New" pitchFamily="34" charset="-122"/>
+                <a:cs typeface="Courier New" pitchFamily="34" charset="-120"/>
+              </a:rPr>
+              <a:t>//</a:t>
+            </a:r>
+            <a:r>
+              <a:rPr lang="en-US" sz="1050" dirty="0">
+                <a:solidFill>
+                  <a:srgbClr val="CCCCCC"/>
+                </a:solidFill>
+                <a:latin typeface="Courier New" pitchFamily="34" charset="0"/>
+                <a:ea typeface="Courier New" pitchFamily="34" charset="-122"/>
+                <a:cs typeface="Courier New" pitchFamily="34" charset="-120"/>
+              </a:rPr>
+              <a:t> </a:t>
+            </a:r>
+            <a:r>
+              <a:rPr lang="en-US" sz="1050" dirty="0">
+                <a:solidFill>
+                  <a:srgbClr val="CCCCCC"/>
+                </a:solidFill>
+                <a:latin typeface="Courier New" pitchFamily="34" charset="0"/>
+                <a:ea typeface="Courier New" pitchFamily="34" charset="-122"/>
+                <a:cs typeface="Courier New" pitchFamily="34" charset="-120"/>
+              </a:rPr>
+              <a:t>…</a:t>
+            </a:r>
+            <a:r>
+              <a:rPr lang="en-US" sz="1050" dirty="0">
+                <a:solidFill>
+                  <a:srgbClr val="CCCCCC"/>
+                </a:solidFill>
+                <a:latin typeface="Courier New" pitchFamily="34" charset="0"/>
+                <a:ea typeface="Courier New" pitchFamily="34" charset="-122"/>
+                <a:cs typeface="Courier New" pitchFamily="34" charset="-120"/>
+              </a:rPr>
+              <a:t> </a:t>
+            </a:r>
+            <a:r>
+              <a:rPr lang="en-US" sz="1050" dirty="0">
+                <a:solidFill>
+                  <a:srgbClr val="CCCCCC"/>
+                </a:solidFill>
+                <a:latin typeface="Courier New" pitchFamily="34" charset="0"/>
+                <a:ea typeface="Courier New" pitchFamily="34" charset="-122"/>
+                <a:cs typeface="Courier New" pitchFamily="34" charset="-120"/>
+              </a:rPr>
+              <a:t>snapshots</a:t>
+            </a:r>
+            <a:r>
+              <a:rPr lang="en-US" sz="1050" dirty="0">
+                <a:solidFill>
+                  <a:srgbClr val="CCCCCC"/>
+                </a:solidFill>
+                <a:latin typeface="Courier New" pitchFamily="34" charset="0"/>
+                <a:ea typeface="Courier New" pitchFamily="34" charset="-122"/>
+                <a:cs typeface="Courier New" pitchFamily="34" charset="-120"/>
+              </a:rPr>
+              <a:t>,</a:t>
+            </a:r>
+            <a:r>
+              <a:rPr lang="en-US" sz="1050" dirty="0">
+                <a:solidFill>
+                  <a:srgbClr val="CCCCCC"/>
+                </a:solidFill>
+                <a:latin typeface="Courier New" pitchFamily="34" charset="0"/>
+                <a:ea typeface="Courier New" pitchFamily="34" charset="-122"/>
+                <a:cs typeface="Courier New" pitchFamily="34" charset="-120"/>
+              </a:rPr>
+              <a:t> </a:t>
+            </a:r>
+            <a:r>
+              <a:rPr lang="en-US" sz="1050" dirty="0">
+                <a:solidFill>
+                  <a:srgbClr val="CCCCCC"/>
+                </a:solidFill>
+                <a:latin typeface="Courier New" pitchFamily="34" charset="0"/>
+                <a:ea typeface="Courier New" pitchFamily="34" charset="-122"/>
+                <a:cs typeface="Courier New" pitchFamily="34" charset="-120"/>
+              </a:rPr>
+              <a:t>reembolso</a:t>
+            </a:r>
+            <a:r>
+              <a:rPr lang="en-US" sz="1050" dirty="0">
+                <a:solidFill>
+                  <a:srgbClr val="CCCCCC"/>
+                </a:solidFill>
+                <a:latin typeface="Courier New" pitchFamily="34" charset="0"/>
+                <a:ea typeface="Courier New" pitchFamily="34" charset="-122"/>
+                <a:cs typeface="Courier New" pitchFamily="34" charset="-120"/>
+              </a:rPr>
+              <a:t> </a:t>
+            </a:r>
+            <a:r>
+              <a:rPr lang="en-US" sz="1050" dirty="0">
+                <a:solidFill>
+                  <a:srgbClr val="CCCCCC"/>
+                </a:solidFill>
+                <a:latin typeface="Courier New" pitchFamily="34" charset="0"/>
+                <a:ea typeface="Courier New" pitchFamily="34" charset="-122"/>
+                <a:cs typeface="Courier New" pitchFamily="34" charset="-120"/>
+              </a:rPr>
+              <a:t>e</a:t>
+            </a:r>
+            <a:r>
+              <a:rPr lang="en-US" sz="1050" dirty="0">
+                <a:solidFill>
+                  <a:srgbClr val="CCCCCC"/>
+                </a:solidFill>
+                <a:latin typeface="Courier New" pitchFamily="34" charset="0"/>
+                <a:ea typeface="Courier New" pitchFamily="34" charset="-122"/>
+                <a:cs typeface="Courier New" pitchFamily="34" charset="-120"/>
+              </a:rPr>
+              <a:t> </a:t>
+            </a:r>
+            <a:r>
+              <a:rPr lang="en-US" sz="1050" dirty="0">
+                <a:solidFill>
+                  <a:srgbClr val="CCCCCC"/>
+                </a:solidFill>
+                <a:latin typeface="Courier New" pitchFamily="34" charset="0"/>
+                <a:ea typeface="Courier New" pitchFamily="34" charset="-122"/>
+                <a:cs typeface="Courier New" pitchFamily="34" charset="-120"/>
+              </a:rPr>
+              <a:t>demais</a:t>
+            </a:r>
+            <a:r>
+              <a:rPr lang="en-US" sz="1050" dirty="0">
+                <a:solidFill>
+                  <a:srgbClr val="CCCCCC"/>
+                </a:solidFill>
+                <a:latin typeface="Courier New" pitchFamily="34" charset="0"/>
+                <a:ea typeface="Courier New" pitchFamily="34" charset="-122"/>
+                <a:cs typeface="Courier New" pitchFamily="34" charset="-120"/>
+              </a:rPr>
+              <a:t> </a:t>
+            </a:r>
+            <a:r>
+              <a:rPr lang="en-US" sz="1050" dirty="0">
+                <a:solidFill>
+                  <a:srgbClr val="CCCCCC"/>
+                </a:solidFill>
+                <a:latin typeface="Courier New" pitchFamily="34" charset="0"/>
+                <a:ea typeface="Courier New" pitchFamily="34" charset="-122"/>
+                <a:cs typeface="Courier New" pitchFamily="34" charset="-120"/>
+              </a:rPr>
+              <a:t>value</a:t>
+            </a:r>
+            <a:r>
+              <a:rPr lang="en-US" sz="1050" dirty="0">
+                <a:solidFill>
+                  <a:srgbClr val="CCCCCC"/>
+                </a:solidFill>
+                <a:latin typeface="Courier New" pitchFamily="34" charset="0"/>
+                <a:ea typeface="Courier New" pitchFamily="34" charset="-122"/>
+                <a:cs typeface="Courier New" pitchFamily="34" charset="-120"/>
+              </a:rPr>
+              <a:t> </a:t>
+            </a:r>
+            <a:r>
+              <a:rPr lang="en-US" sz="1050" dirty="0">
+                <a:solidFill>
+                  <a:srgbClr val="CCCCCC"/>
+                </a:solidFill>
+                <a:latin typeface="Courier New" pitchFamily="34" charset="0"/>
+                <a:ea typeface="Courier New" pitchFamily="34" charset="-122"/>
+                <a:cs typeface="Courier New" pitchFamily="34" charset="-120"/>
+              </a:rPr>
+              <a:t>helps</a:t>
             </a:r>
             <a:endParaRPr lang="en-US" sz="1050" dirty="0"/>
           </a:p>
@@ -10013,7 +10134,7 @@
                 <a:ea typeface="Courier New" pitchFamily="34" charset="-122"/>
                 <a:cs typeface="Courier New" pitchFamily="34" charset="-120"/>
               </a:rPr>
-              <a:t>as Travel</a:t>
+              <a:t>as Pedido</a:t>
             </a:r>
             <a:r>
               <a:rPr lang="en-US" sz="1050" dirty="0">
@@ -10130,7 +10251,7 @@
                   <a:srgbClr val="556B82"/>
                 </a:solidFill>
               </a:rPr>
-              <a:t>Só entidades expostas podem ser navegadas, como Travel → Booking.</a:t>
+              <a:t>Só entidades expostas podem ser navegadas, como Pedido → ItemPedido.</a:t>
             </a:r>
             <a:endParaRPr lang="en-US" sz="1400" dirty="0"/>
           </a:p>
@@ -10367,7 +10488,7 @@
                   <a:srgbClr val="89D1FF"/>
                 </a:solidFill>
               </a:rPr>
-              <a:t>AULA 03.02 · SEÇÃO 2</a:t>
+              <a:t>AULA 05.02 · SEÇÃO 2</a:t>
             </a:r>
             <a:endParaRPr lang="en-US" sz="1300" dirty="0"/>
           </a:p>
@@ -11759,7 +11880,7 @@
                   <a:srgbClr val="0064D9"/>
                 </a:solidFill>
               </a:rPr>
-              <a:t>Convenção do curso  </a:t>
+              <a:t>Convenção  </a:t>
             </a:r>
             <a:r>
               <a:rPr lang="en-US" sz="1200" dirty="0">
@@ -11767,7 +11888,7 @@
                   <a:srgbClr val="1D2D3E"/>
                 </a:solidFill>
               </a:rPr>
-              <a:t>o binding </a:t>
+              <a:t>o binding do projeto é </a:t>
             </a:r>
             <a:r>
               <a:rPr lang="en-US" sz="1200" dirty="0">
@@ -11778,7 +11899,7 @@
                 <a:ea typeface="Courier New" pitchFamily="34" charset="-122"/>
                 <a:cs typeface="Courier New" pitchFamily="34" charset="-120"/>
               </a:rPr>
-              <a:t>ZUI_FE_TRAVEL_######_O4</a:t>
+              <a:t>ZUI_PC_PEDIDOS_COMPRAS_O4</a:t>
             </a:r>
             <a:r>
               <a:rPr lang="en-US" sz="1200" dirty="0">
@@ -12613,7 +12734,7 @@
                   <a:srgbClr val="89D1FF"/>
                 </a:solidFill>
               </a:rPr>
-              <a:t>AULA 03.02 · SEÇÃO 3</a:t>
+              <a:t>AULA 05.02 · SEÇÃO 3</a:t>
             </a:r>
             <a:endParaRPr lang="en-US" sz="1300" dirty="0"/>
           </a:p>
